--- a/e2e/fixtures/line-fill-fidelity.pptx
+++ b/e2e/fixtures/line-fill-fidelity.pptx
@@ -209,9 +209,38 @@
           <a:p/>
         </p:txBody>
       </p:sp>
+      <p:sp>
+        <p:nvSpPr>
+          <p:cNvPr id="7" name="algn-in-control"/>
+          <p:cNvSpPr/>
+          <p:nvPr/>
+        </p:nvSpPr>
+        <p:spPr>
+          <a:xfrm>
+            <a:off x="508000" y="2095500"/>
+            <a:ext cx="2413000" cy="508000"/>
+          </a:xfrm>
+          <a:prstGeom prst="rect">
+            <a:avLst/>
+          </a:prstGeom>
+          <a:solidFill>
+            <a:srgbClr val="FFFFFF"/>
+          </a:solidFill>
+          <a:ln w="76200" cmpd="sng" algn="in">
+            <a:solidFill>
+              <a:srgbClr val="C00000"/>
+            </a:solidFill>
+          </a:ln>
+        </p:spPr>
+        <p:txBody>
+          <a:bodyPr/>
+          <a:lstStyle/>
+          <a:p/>
+        </p:txBody>
+      </p:sp>
       <p:pic>
         <p:nvPicPr>
-          <p:cNvPr id="7" name="tile-plain"/>
+          <p:cNvPr id="8" name="tile-plain"/>
           <p:cNvPicPr/>
           <p:nvPr/>
         </p:nvPicPr>
@@ -231,7 +260,7 @@
       </p:pic>
       <p:pic>
         <p:nvPicPr>
-          <p:cNvPr id="8" name="tile-flip"/>
+          <p:cNvPr id="9" name="tile-flip"/>
           <p:cNvPicPr/>
           <p:nvPr/>
         </p:nvPicPr>
@@ -251,7 +280,7 @@
       </p:pic>
       <p:sp>
         <p:nvSpPr>
-          <p:cNvPr id="9" name="hollow-text"/>
+          <p:cNvPr id="10" name="hollow-text"/>
           <p:cNvSpPr txBox="1"/>
           <p:nvPr/>
         </p:nvSpPr>
@@ -293,7 +322,7 @@
       </p:sp>
       <p:sp>
         <p:nvSpPr>
-          <p:cNvPr id="10" name="solid-text"/>
+          <p:cNvPr id="11" name="solid-text"/>
           <p:cNvSpPr txBox="1"/>
           <p:nvPr/>
         </p:nvSpPr>
